--- a/Slide_ASM_PY00202_MinhTV.pptx
+++ b/Slide_ASM_PY00202_MinhTV.pptx
@@ -845,7 +845,7 @@
           <a:p>
             <a:fld id="{F1179608-FA98-4C03-8D9B-C5C46EEBD8A0}" type="datetimeFigureOut">
               <a:rPr lang="en-US" smtClean="0"/>
-              <a:t>10/26/2025</a:t>
+              <a:t>10/28/2025</a:t>
             </a:fld>
             <a:endParaRPr lang="en-US"/>
           </a:p>
@@ -1096,7 +1096,7 @@
           <a:p>
             <a:fld id="{F1179608-FA98-4C03-8D9B-C5C46EEBD8A0}" type="datetimeFigureOut">
               <a:rPr lang="en-US" smtClean="0"/>
-              <a:t>10/26/2025</a:t>
+              <a:t>10/28/2025</a:t>
             </a:fld>
             <a:endParaRPr lang="en-US"/>
           </a:p>
@@ -1410,7 +1410,7 @@
           <a:p>
             <a:fld id="{F1179608-FA98-4C03-8D9B-C5C46EEBD8A0}" type="datetimeFigureOut">
               <a:rPr lang="en-US" smtClean="0"/>
-              <a:t>10/26/2025</a:t>
+              <a:t>10/28/2025</a:t>
             </a:fld>
             <a:endParaRPr lang="en-US"/>
           </a:p>
@@ -1751,7 +1751,7 @@
           <a:p>
             <a:fld id="{F1179608-FA98-4C03-8D9B-C5C46EEBD8A0}" type="datetimeFigureOut">
               <a:rPr lang="en-US" smtClean="0"/>
-              <a:t>10/26/2025</a:t>
+              <a:t>10/28/2025</a:t>
             </a:fld>
             <a:endParaRPr lang="en-US"/>
           </a:p>
@@ -2065,7 +2065,7 @@
           <a:p>
             <a:fld id="{F1179608-FA98-4C03-8D9B-C5C46EEBD8A0}" type="datetimeFigureOut">
               <a:rPr lang="en-US" smtClean="0"/>
-              <a:t>10/26/2025</a:t>
+              <a:t>10/28/2025</a:t>
             </a:fld>
             <a:endParaRPr lang="en-US"/>
           </a:p>
@@ -2458,7 +2458,7 @@
           <a:p>
             <a:fld id="{F1179608-FA98-4C03-8D9B-C5C46EEBD8A0}" type="datetimeFigureOut">
               <a:rPr lang="en-US" smtClean="0"/>
-              <a:t>10/26/2025</a:t>
+              <a:t>10/28/2025</a:t>
             </a:fld>
             <a:endParaRPr lang="en-US"/>
           </a:p>
@@ -2628,7 +2628,7 @@
           <a:p>
             <a:fld id="{F1179608-FA98-4C03-8D9B-C5C46EEBD8A0}" type="datetimeFigureOut">
               <a:rPr lang="en-US" smtClean="0"/>
-              <a:t>10/26/2025</a:t>
+              <a:t>10/28/2025</a:t>
             </a:fld>
             <a:endParaRPr lang="en-US"/>
           </a:p>
@@ -2808,7 +2808,7 @@
           <a:p>
             <a:fld id="{F1179608-FA98-4C03-8D9B-C5C46EEBD8A0}" type="datetimeFigureOut">
               <a:rPr lang="en-US" smtClean="0"/>
-              <a:t>10/26/2025</a:t>
+              <a:t>10/28/2025</a:t>
             </a:fld>
             <a:endParaRPr lang="en-US"/>
           </a:p>
@@ -2984,7 +2984,7 @@
           <a:p>
             <a:fld id="{F1179608-FA98-4C03-8D9B-C5C46EEBD8A0}" type="datetimeFigureOut">
               <a:rPr lang="en-US" smtClean="0"/>
-              <a:t>10/26/2025</a:t>
+              <a:t>10/28/2025</a:t>
             </a:fld>
             <a:endParaRPr lang="en-US"/>
           </a:p>
@@ -3231,7 +3231,7 @@
           <a:p>
             <a:fld id="{F1179608-FA98-4C03-8D9B-C5C46EEBD8A0}" type="datetimeFigureOut">
               <a:rPr lang="en-US" smtClean="0"/>
-              <a:t>10/26/2025</a:t>
+              <a:t>10/28/2025</a:t>
             </a:fld>
             <a:endParaRPr lang="en-US"/>
           </a:p>
@@ -3463,7 +3463,7 @@
           <a:p>
             <a:fld id="{F1179608-FA98-4C03-8D9B-C5C46EEBD8A0}" type="datetimeFigureOut">
               <a:rPr lang="en-US" smtClean="0"/>
-              <a:t>10/26/2025</a:t>
+              <a:t>10/28/2025</a:t>
             </a:fld>
             <a:endParaRPr lang="en-US"/>
           </a:p>
@@ -3837,7 +3837,7 @@
           <a:p>
             <a:fld id="{F1179608-FA98-4C03-8D9B-C5C46EEBD8A0}" type="datetimeFigureOut">
               <a:rPr lang="en-US" smtClean="0"/>
-              <a:t>10/26/2025</a:t>
+              <a:t>10/28/2025</a:t>
             </a:fld>
             <a:endParaRPr lang="en-US"/>
           </a:p>
@@ -3960,7 +3960,7 @@
           <a:p>
             <a:fld id="{F1179608-FA98-4C03-8D9B-C5C46EEBD8A0}" type="datetimeFigureOut">
               <a:rPr lang="en-US" smtClean="0"/>
-              <a:t>10/26/2025</a:t>
+              <a:t>10/28/2025</a:t>
             </a:fld>
             <a:endParaRPr lang="en-US"/>
           </a:p>
@@ -4055,7 +4055,7 @@
           <a:p>
             <a:fld id="{F1179608-FA98-4C03-8D9B-C5C46EEBD8A0}" type="datetimeFigureOut">
               <a:rPr lang="en-US" smtClean="0"/>
-              <a:t>10/26/2025</a:t>
+              <a:t>10/28/2025</a:t>
             </a:fld>
             <a:endParaRPr lang="en-US"/>
           </a:p>
@@ -4310,7 +4310,7 @@
           <a:p>
             <a:fld id="{F1179608-FA98-4C03-8D9B-C5C46EEBD8A0}" type="datetimeFigureOut">
               <a:rPr lang="en-US" smtClean="0"/>
-              <a:t>10/26/2025</a:t>
+              <a:t>10/28/2025</a:t>
             </a:fld>
             <a:endParaRPr lang="en-US"/>
           </a:p>
@@ -4573,7 +4573,7 @@
           <a:p>
             <a:fld id="{F1179608-FA98-4C03-8D9B-C5C46EEBD8A0}" type="datetimeFigureOut">
               <a:rPr lang="en-US" smtClean="0"/>
-              <a:t>10/26/2025</a:t>
+              <a:t>10/28/2025</a:t>
             </a:fld>
             <a:endParaRPr lang="en-US"/>
           </a:p>
@@ -5316,7 +5316,7 @@
           <a:p>
             <a:fld id="{F1179608-FA98-4C03-8D9B-C5C46EEBD8A0}" type="datetimeFigureOut">
               <a:rPr lang="en-US" smtClean="0"/>
-              <a:t>10/26/2025</a:t>
+              <a:t>10/28/2025</a:t>
             </a:fld>
             <a:endParaRPr lang="en-US"/>
           </a:p>
@@ -5893,13 +5893,17 @@
           <a:lstStyle/>
           <a:p>
             <a:r>
-              <a:rPr lang="en-US" sz="2400"/>
+              <a:rPr lang="en-US" sz="2400">
+                <a:latin typeface="Montserrat" pitchFamily="2" charset="0"/>
+              </a:rPr>
               <a:t>LẬP TRÌNH JAVA 3</a:t>
             </a:r>
           </a:p>
           <a:p>
             <a:r>
-              <a:rPr lang="en-US" sz="2400"/>
+              <a:rPr lang="en-US" sz="2400">
+                <a:latin typeface="Montserrat" pitchFamily="2" charset="0"/>
+              </a:rPr>
               <a:t>Sinh viên thực hiện:  Trần Văn Minh – PY00202</a:t>
             </a:r>
           </a:p>
@@ -6379,10 +6383,15 @@
         <p:spPr/>
         <p:txBody>
           <a:bodyPr>
-            <a:normAutofit/>
+            <a:normAutofit fontScale="70000" lnSpcReduction="20000"/>
           </a:bodyPr>
           <a:lstStyle/>
           <a:p>
+            <a:pPr>
+              <a:lnSpc>
+                <a:spcPct val="170000"/>
+              </a:lnSpc>
+            </a:pPr>
             <a:r>
               <a:rPr lang="en-US" sz="2400">
                 <a:latin typeface="Montserrat" pitchFamily="2" charset="0"/>
@@ -6391,6 +6400,11 @@
             </a:r>
           </a:p>
           <a:p>
+            <a:pPr>
+              <a:lnSpc>
+                <a:spcPct val="170000"/>
+              </a:lnSpc>
+            </a:pPr>
             <a:r>
               <a:rPr lang="en-US" sz="2400">
                 <a:latin typeface="Montserrat" pitchFamily="2" charset="0"/>
@@ -6399,6 +6413,11 @@
             </a:r>
           </a:p>
           <a:p>
+            <a:pPr>
+              <a:lnSpc>
+                <a:spcPct val="170000"/>
+              </a:lnSpc>
+            </a:pPr>
             <a:r>
               <a:rPr lang="en-US" sz="2400">
                 <a:latin typeface="Montserrat" pitchFamily="2" charset="0"/>
@@ -6407,6 +6426,11 @@
             </a:r>
           </a:p>
           <a:p>
+            <a:pPr>
+              <a:lnSpc>
+                <a:spcPct val="170000"/>
+              </a:lnSpc>
+            </a:pPr>
             <a:r>
               <a:rPr lang="en-US" sz="2400">
                 <a:latin typeface="Montserrat" pitchFamily="2" charset="0"/>
@@ -6415,6 +6439,11 @@
             </a:r>
           </a:p>
           <a:p>
+            <a:pPr>
+              <a:lnSpc>
+                <a:spcPct val="170000"/>
+              </a:lnSpc>
+            </a:pPr>
             <a:r>
               <a:rPr lang="en-US" sz="2400">
                 <a:latin typeface="Montserrat" pitchFamily="2" charset="0"/>
@@ -6423,6 +6452,11 @@
             </a:r>
           </a:p>
           <a:p>
+            <a:pPr>
+              <a:lnSpc>
+                <a:spcPct val="170000"/>
+              </a:lnSpc>
+            </a:pPr>
             <a:r>
               <a:rPr lang="en-US" sz="2400">
                 <a:latin typeface="Montserrat" pitchFamily="2" charset="0"/>
@@ -6431,6 +6465,11 @@
             </a:r>
           </a:p>
           <a:p>
+            <a:pPr>
+              <a:lnSpc>
+                <a:spcPct val="170000"/>
+              </a:lnSpc>
+            </a:pPr>
             <a:r>
               <a:rPr lang="en-US" sz="2400">
                 <a:latin typeface="Montserrat" pitchFamily="2" charset="0"/>
@@ -6562,14 +6601,23 @@
             <p:ph idx="1"/>
           </p:nvPr>
         </p:nvSpPr>
-        <p:spPr/>
+        <p:spPr>
+          <a:xfrm>
+            <a:off x="564212" y="1488613"/>
+            <a:ext cx="8596668" cy="3880773"/>
+          </a:xfrm>
+        </p:spPr>
         <p:txBody>
           <a:bodyPr>
             <a:noAutofit/>
           </a:bodyPr>
           <a:lstStyle/>
           <a:p>
-            <a:pPr algn="just"/>
+            <a:pPr algn="just">
+              <a:lnSpc>
+                <a:spcPct val="150000"/>
+              </a:lnSpc>
+            </a:pPr>
             <a:r>
               <a:rPr lang="en-US">
                 <a:latin typeface="Montserrat" pitchFamily="2" charset="0"/>
@@ -6578,7 +6626,11 @@
             </a:r>
           </a:p>
           <a:p>
-            <a:pPr algn="just"/>
+            <a:pPr algn="just">
+              <a:lnSpc>
+                <a:spcPct val="150000"/>
+              </a:lnSpc>
+            </a:pPr>
             <a:r>
               <a:rPr lang="en-US">
                 <a:latin typeface="Montserrat" pitchFamily="2" charset="0"/>
@@ -6600,7 +6652,11 @@
             </a:r>
           </a:p>
           <a:p>
-            <a:pPr algn="just"/>
+            <a:pPr algn="just">
+              <a:lnSpc>
+                <a:spcPct val="150000"/>
+              </a:lnSpc>
+            </a:pPr>
             <a:r>
               <a:rPr lang="en-US">
                 <a:latin typeface="Montserrat" pitchFamily="2" charset="0"/>
@@ -6609,7 +6665,11 @@
             </a:r>
           </a:p>
           <a:p>
-            <a:pPr lvl="1" algn="just"/>
+            <a:pPr lvl="1" algn="just">
+              <a:lnSpc>
+                <a:spcPct val="150000"/>
+              </a:lnSpc>
+            </a:pPr>
             <a:r>
               <a:rPr lang="en-US" sz="2000">
                 <a:latin typeface="Montserrat" pitchFamily="2" charset="0"/>
@@ -6618,7 +6678,11 @@
             </a:r>
           </a:p>
           <a:p>
-            <a:pPr lvl="1" algn="just"/>
+            <a:pPr lvl="1" algn="just">
+              <a:lnSpc>
+                <a:spcPct val="150000"/>
+              </a:lnSpc>
+            </a:pPr>
             <a:r>
               <a:rPr lang="en-US" sz="2000">
                 <a:latin typeface="Montserrat" pitchFamily="2" charset="0"/>
@@ -6627,7 +6691,11 @@
             </a:r>
           </a:p>
           <a:p>
-            <a:pPr lvl="1" algn="just"/>
+            <a:pPr lvl="1" algn="just">
+              <a:lnSpc>
+                <a:spcPct val="150000"/>
+              </a:lnSpc>
+            </a:pPr>
             <a:r>
               <a:rPr lang="en-US" sz="2000">
                 <a:latin typeface="Montserrat" pitchFamily="2" charset="0"/>
@@ -6636,7 +6704,11 @@
             </a:r>
           </a:p>
           <a:p>
-            <a:pPr algn="just"/>
+            <a:pPr algn="just">
+              <a:lnSpc>
+                <a:spcPct val="150000"/>
+              </a:lnSpc>
+            </a:pPr>
             <a:r>
               <a:rPr lang="en-US">
                 <a:latin typeface="Montserrat" pitchFamily="2" charset="0"/>
@@ -6765,6 +6837,11 @@
           <a:bodyPr/>
           <a:lstStyle/>
           <a:p>
+            <a:pPr>
+              <a:lnSpc>
+                <a:spcPct val="150000"/>
+              </a:lnSpc>
+            </a:pPr>
             <a:r>
               <a:rPr lang="en-US" sz="2800">
                 <a:latin typeface="Montserrat" pitchFamily="2" charset="0"/>
@@ -6773,7 +6850,11 @@
             </a:r>
           </a:p>
           <a:p>
-            <a:pPr lvl="1"/>
+            <a:pPr lvl="1">
+              <a:lnSpc>
+                <a:spcPct val="150000"/>
+              </a:lnSpc>
+            </a:pPr>
             <a:r>
               <a:rPr lang="en-US" sz="2400">
                 <a:latin typeface="Montserrat" pitchFamily="2" charset="0"/>
@@ -6782,7 +6863,11 @@
             </a:r>
           </a:p>
           <a:p>
-            <a:pPr lvl="1"/>
+            <a:pPr lvl="1">
+              <a:lnSpc>
+                <a:spcPct val="150000"/>
+              </a:lnSpc>
+            </a:pPr>
             <a:r>
               <a:rPr lang="en-US" sz="2400">
                 <a:latin typeface="Montserrat" pitchFamily="2" charset="0"/>
@@ -6791,7 +6876,11 @@
             </a:r>
           </a:p>
           <a:p>
-            <a:pPr lvl="1"/>
+            <a:pPr lvl="1">
+              <a:lnSpc>
+                <a:spcPct val="150000"/>
+              </a:lnSpc>
+            </a:pPr>
             <a:r>
               <a:rPr lang="en-US" sz="2400">
                 <a:latin typeface="Montserrat" pitchFamily="2" charset="0"/>
@@ -6800,7 +6889,11 @@
             </a:r>
           </a:p>
           <a:p>
-            <a:pPr lvl="1"/>
+            <a:pPr lvl="1">
+              <a:lnSpc>
+                <a:spcPct val="150000"/>
+              </a:lnSpc>
+            </a:pPr>
             <a:r>
               <a:rPr lang="en-US" sz="2400">
                 <a:latin typeface="Montserrat" pitchFamily="2" charset="0"/>
@@ -6931,6 +7024,11 @@
           <a:bodyPr/>
           <a:lstStyle/>
           <a:p>
+            <a:pPr>
+              <a:lnSpc>
+                <a:spcPct val="150000"/>
+              </a:lnSpc>
+            </a:pPr>
             <a:r>
               <a:rPr lang="en-US">
                 <a:latin typeface="Montserrat" pitchFamily="2" charset="0"/>
@@ -6939,7 +7037,11 @@
             </a:r>
           </a:p>
           <a:p>
-            <a:pPr lvl="1"/>
+            <a:pPr lvl="1">
+              <a:lnSpc>
+                <a:spcPct val="150000"/>
+              </a:lnSpc>
+            </a:pPr>
             <a:r>
               <a:rPr lang="en-US">
                 <a:latin typeface="Montserrat" pitchFamily="2" charset="0"/>
@@ -6948,7 +7050,11 @@
             </a:r>
           </a:p>
           <a:p>
-            <a:pPr lvl="1"/>
+            <a:pPr lvl="1">
+              <a:lnSpc>
+                <a:spcPct val="150000"/>
+              </a:lnSpc>
+            </a:pPr>
             <a:r>
               <a:rPr lang="en-US">
                 <a:latin typeface="Montserrat" pitchFamily="2" charset="0"/>
@@ -6957,7 +7063,11 @@
             </a:r>
           </a:p>
           <a:p>
-            <a:pPr lvl="1"/>
+            <a:pPr lvl="1">
+              <a:lnSpc>
+                <a:spcPct val="150000"/>
+              </a:lnSpc>
+            </a:pPr>
             <a:r>
               <a:rPr lang="en-US">
                 <a:latin typeface="Montserrat" pitchFamily="2" charset="0"/>
@@ -6966,7 +7076,11 @@
             </a:r>
           </a:p>
           <a:p>
-            <a:pPr lvl="1"/>
+            <a:pPr lvl="1">
+              <a:lnSpc>
+                <a:spcPct val="150000"/>
+              </a:lnSpc>
+            </a:pPr>
             <a:r>
               <a:rPr lang="en-US">
                 <a:latin typeface="Montserrat" pitchFamily="2" charset="0"/>
@@ -6975,7 +7089,11 @@
             </a:r>
           </a:p>
           <a:p>
-            <a:pPr lvl="1"/>
+            <a:pPr lvl="1">
+              <a:lnSpc>
+                <a:spcPct val="150000"/>
+              </a:lnSpc>
+            </a:pPr>
             <a:r>
               <a:rPr lang="en-US">
                 <a:latin typeface="Montserrat" pitchFamily="2" charset="0"/>
@@ -7103,9 +7221,16 @@
         </p:nvSpPr>
         <p:spPr/>
         <p:txBody>
-          <a:bodyPr/>
-          <a:lstStyle/>
-          <a:p>
+          <a:bodyPr>
+            <a:normAutofit lnSpcReduction="10000"/>
+          </a:bodyPr>
+          <a:lstStyle/>
+          <a:p>
+            <a:pPr>
+              <a:lnSpc>
+                <a:spcPct val="150000"/>
+              </a:lnSpc>
+            </a:pPr>
             <a:r>
               <a:rPr lang="en-US">
                 <a:latin typeface="Montserrat" pitchFamily="2" charset="0"/>
@@ -7114,7 +7239,11 @@
             </a:r>
           </a:p>
           <a:p>
-            <a:pPr lvl="1"/>
+            <a:pPr lvl="1">
+              <a:lnSpc>
+                <a:spcPct val="150000"/>
+              </a:lnSpc>
+            </a:pPr>
             <a:r>
               <a:rPr lang="en-US">
                 <a:latin typeface="Montserrat" pitchFamily="2" charset="0"/>
@@ -7123,7 +7252,11 @@
             </a:r>
           </a:p>
           <a:p>
-            <a:pPr lvl="1"/>
+            <a:pPr lvl="1">
+              <a:lnSpc>
+                <a:spcPct val="150000"/>
+              </a:lnSpc>
+            </a:pPr>
             <a:r>
               <a:rPr lang="en-US">
                 <a:latin typeface="Montserrat" pitchFamily="2" charset="0"/>
@@ -7132,7 +7265,11 @@
             </a:r>
           </a:p>
           <a:p>
-            <a:pPr lvl="1"/>
+            <a:pPr lvl="1">
+              <a:lnSpc>
+                <a:spcPct val="150000"/>
+              </a:lnSpc>
+            </a:pPr>
             <a:r>
               <a:rPr lang="en-US">
                 <a:latin typeface="Montserrat" pitchFamily="2" charset="0"/>
@@ -7141,6 +7278,11 @@
             </a:r>
           </a:p>
           <a:p>
+            <a:pPr>
+              <a:lnSpc>
+                <a:spcPct val="150000"/>
+              </a:lnSpc>
+            </a:pPr>
             <a:r>
               <a:rPr lang="en-US">
                 <a:latin typeface="Montserrat" pitchFamily="2" charset="0"/>
@@ -7149,7 +7291,11 @@
             </a:r>
           </a:p>
           <a:p>
-            <a:pPr lvl="1"/>
+            <a:pPr lvl="1">
+              <a:lnSpc>
+                <a:spcPct val="150000"/>
+              </a:lnSpc>
+            </a:pPr>
             <a:r>
               <a:rPr lang="en-US">
                 <a:latin typeface="Montserrat" pitchFamily="2" charset="0"/>
@@ -7158,7 +7304,11 @@
             </a:r>
           </a:p>
           <a:p>
-            <a:pPr lvl="1"/>
+            <a:pPr lvl="1">
+              <a:lnSpc>
+                <a:spcPct val="150000"/>
+              </a:lnSpc>
+            </a:pPr>
             <a:r>
               <a:rPr lang="en-US">
                 <a:latin typeface="Montserrat" pitchFamily="2" charset="0"/>
@@ -7167,7 +7317,11 @@
             </a:r>
           </a:p>
           <a:p>
-            <a:pPr lvl="1"/>
+            <a:pPr lvl="1">
+              <a:lnSpc>
+                <a:spcPct val="150000"/>
+              </a:lnSpc>
+            </a:pPr>
             <a:r>
               <a:rPr lang="en-US">
                 <a:latin typeface="Montserrat" pitchFamily="2" charset="0"/>
@@ -7381,8 +7535,8 @@
         </p:blipFill>
         <p:spPr>
           <a:xfrm>
-            <a:off x="677334" y="1632687"/>
-            <a:ext cx="7969372" cy="4615713"/>
+            <a:off x="677333" y="1632687"/>
+            <a:ext cx="9052589" cy="4615713"/>
           </a:xfrm>
         </p:spPr>
       </p:pic>
@@ -7476,8 +7630,8 @@
         </p:blipFill>
         <p:spPr>
           <a:xfrm>
-            <a:off x="864508" y="1899763"/>
-            <a:ext cx="8049250" cy="2996939"/>
+            <a:off x="501105" y="2050592"/>
+            <a:ext cx="9177339" cy="3416955"/>
           </a:xfrm>
         </p:spPr>
       </p:pic>
@@ -7531,7 +7685,7 @@
         </p:nvSpPr>
         <p:spPr>
           <a:xfrm>
-            <a:off x="3628985" y="5310900"/>
+            <a:off x="3566762" y="5879068"/>
             <a:ext cx="3046027" cy="369332"/>
           </a:xfrm>
           <a:prstGeom prst="rect">
@@ -7650,8 +7804,8 @@
         </p:blipFill>
         <p:spPr>
           <a:xfrm>
-            <a:off x="761467" y="1270000"/>
-            <a:ext cx="7364437" cy="5096894"/>
+            <a:off x="677334" y="1151506"/>
+            <a:ext cx="9550748" cy="5096894"/>
           </a:xfrm>
         </p:spPr>
       </p:pic>
